--- a/pictures/slides/starling-2-max-diagrams.pptx
+++ b/pictures/slides/starling-2-max-diagrams.pptx
@@ -3276,8 +3276,8 @@
         </p:blipFill>
         <p:spPr>
           <a:xfrm>
-            <a:off x="1337388" y="0"/>
-            <a:ext cx="9517224" cy="6858000"/>
+            <a:off x="1478733" y="0"/>
+            <a:ext cx="9234534" cy="6858000"/>
           </a:xfrm>
           <a:prstGeom prst="rect">
             <a:avLst/>
